--- a/DBTUNING/Day01_SQL튜닝입문과측정도구/SQL튜닝_Ch03_교안.pptx
+++ b/DBTUNING/Day01_SQL튜닝입문과측정도구/SQL튜닝_Ch03_교안.pptx
@@ -18419,7 +18419,7 @@
                 </a:solidFill>
                 <a:latin typeface="Consolas"/>
               </a:rPr>
-              <a:t>| 2  |   HASH JOIN                        |                |   297 |  6237 |   859  (1)|</a:t>
+              <a:t>| 2  |   HASH JOIN                        |                |   292 |  4672 |   858  (1)|</a:t>
             </a:r>
           </a:p>
           <a:p>
@@ -18452,7 +18452,7 @@
                 </a:solidFill>
                 <a:latin typeface="Consolas"/>
               </a:rPr>
-              <a:t>| 5  |    TABLE ACCESS FULL               | MEDICAL_CLAIMS | 29631 |   260K|   855  (1)|</a:t>
+              <a:t>| 5  |    TABLE ACCESS FULL               | MEDICAL_CLAIMS | 29128 |   113K|   855  (1)|</a:t>
             </a:r>
           </a:p>
           <a:p>
@@ -18711,7 +18711,7 @@
                 </a:solidFill>
                 <a:latin typeface="Malgun Gothic"/>
               </a:rPr>
-              <a:t>    –  HOSPITALS Rows 10 vs MEDICAL_CLAIMS Rows 29631 — 작은 쪽이 Build 입력</a:t>
+              <a:t>    –  HOSPITALS Rows 10 vs MEDICAL_CLAIMS Rows 29128 — 작은 쪽이 Build 입력</a:t>
             </a:r>
           </a:p>
           <a:p>
